--- a/dist/초5/수학/도형과측정/초5_수학_도형과측정_08_사다리꼴과마름모의넓이_학생용.pptx
+++ b/dist/초5/수학/도형과측정/초5_수학_도형과측정_08_사다리꼴과마름모의넓이_학생용.pptx
@@ -120,13 +120,13 @@
   <p:extLst>
     <p:ext uri="{521415D9-36F7-43E2-AB2F-B90AF26B5E84}">
       <p14:sectionLst xmlns:p14="http://schemas.microsoft.com/office/powerpoint/2010/main">
-        <p14:section name="도입" id="{5eda9fe8-d148-b2e5-bfb7-fa028c551d02}">
+        <p14:section name="도입" id="{3dd3ea81-8873-3224-0bf4-5cd0c43b2d8e}">
           <p14:sldIdLst>
             <p14:sldId id="256"/>
             <p14:sldId id="257"/>
           </p14:sldIdLst>
         </p14:section>
-        <p14:section name="개념" id="{7230bba2-1d59-c8b8-efcc-70c413e9d5bc}">
+        <p14:section name="개념" id="{a84a4008-f143-20a8-6e92-19d35d325dba}">
           <p14:sldIdLst>
             <p14:sldId id="258"/>
             <p14:sldId id="259"/>
@@ -135,31 +135,31 @@
             <p14:sldId id="264"/>
           </p14:sldIdLst>
         </p14:section>
-        <p14:section name="연습" id="{36e674b6-6a37-87db-f08d-130b06997254}">
+        <p14:section name="연습" id="{0a32c063-950d-b26c-b71f-e60f3f4be275}">
           <p14:sldIdLst>
             <p14:sldId id="261"/>
             <p14:sldId id="262"/>
             <p14:sldId id="265"/>
           </p14:sldIdLst>
         </p14:section>
-        <p14:section name="개념" id="{95c2e62d-a891-b03d-3303-92831da8a7f7}">
+        <p14:section name="개념" id="{a84e2122-31c5-523d-de86-b9411647db38}">
           <p14:sldIdLst/>
         </p14:section>
-        <p14:section name="연습" id="{158d0128-f00a-cd77-36d1-5b14b845c8b3}">
+        <p14:section name="연습" id="{cf7e2f25-e682-7a8d-eb93-a0b7b2018280}">
           <p14:sldIdLst/>
         </p14:section>
-        <p14:section name="확인" id="{47ece0e3-a8e6-cf73-5dab-aec260caee37}">
+        <p14:section name="확인" id="{d5ed58f6-068e-8dbc-92ac-2fb418eda9e8}">
           <p14:sldIdLst>
             <p14:sldId id="266"/>
             <p14:sldId id="267"/>
           </p14:sldIdLst>
         </p14:section>
-        <p14:section name="정리" id="{495d78e4-a8f4-9bfe-42a5-0a50e99b64cb}">
+        <p14:section name="정리" id="{cc512aaf-c9da-63dc-e01c-2d9dc7e96ade}">
           <p14:sldIdLst>
             <p14:sldId id="268"/>
           </p14:sldIdLst>
         </p14:section>
-        <p14:section name="보충" id="{dbd458d6-dde1-b1d1-7fcb-13ca8a075571}">
+        <p14:section name="보충" id="{36460459-09bb-b938-0356-219f5fbd94a0}">
           <p14:sldIdLst>
             <p14:sldId id="269"/>
           </p14:sldIdLst>
@@ -3606,8 +3606,8 @@
         </p:nvSpPr>
         <p:spPr>
           <a:xfrm>
-            <a:off x="1616710" y="2365248"/>
-            <a:ext cx="3226816" cy="2420112"/>
+            <a:off x="1837250" y="2530653"/>
+            <a:ext cx="2785737" cy="2089302"/>
           </a:xfrm>
           <a:custGeom>
             <a:avLst/>
@@ -3616,18 +3616,18 @@
             <a:cxnLst/>
             <a:rect l="l" t="t" r="r" b="b"/>
             <a:pathLst>
-              <a:path w="3226816" h="2420112">
+              <a:path w="2785737" h="2089302">
                 <a:moveTo>
-                  <a:pt x="0" y="1210056"/>
+                  <a:pt x="0" y="1044651"/>
                 </a:moveTo>
                 <a:lnTo>
-                  <a:pt x="1613408" y="2420112"/>
+                  <a:pt x="1392868" y="2089302"/>
                 </a:lnTo>
                 <a:lnTo>
-                  <a:pt x="3226816" y="1210056"/>
+                  <a:pt x="2785737" y="1044651"/>
                 </a:lnTo>
                 <a:lnTo>
-                  <a:pt x="1613408" y="0"/>
+                  <a:pt x="1392868" y="0"/>
                 </a:lnTo>
                 <a:close/>
               </a:path>
@@ -3652,8 +3652,8 @@
         </p:nvSpPr>
         <p:spPr>
           <a:xfrm>
-            <a:off x="1616710" y="3575304"/>
-            <a:ext cx="3226816" cy="0"/>
+            <a:off x="1837250" y="3575304"/>
+            <a:ext cx="2785737" cy="0"/>
           </a:xfrm>
           <a:prstGeom prst="line">
             <a:avLst/>
@@ -3675,8 +3675,8 @@
         </p:nvSpPr>
         <p:spPr>
           <a:xfrm flipV="1">
-            <a:off x="3230118" y="2365248"/>
-            <a:ext cx="0" cy="2420112"/>
+            <a:off x="3230118" y="2530653"/>
+            <a:ext cx="0" cy="2089302"/>
           </a:xfrm>
           <a:prstGeom prst="line">
             <a:avLst/>
@@ -3698,7 +3698,7 @@
         </p:nvSpPr>
         <p:spPr>
           <a:xfrm>
-            <a:off x="1786169" y="4346351"/>
+            <a:off x="1896439" y="4263649"/>
             <a:ext cx="763524" cy="349250"/>
           </a:xfrm>
           <a:prstGeom prst="rect">
@@ -3737,7 +3737,7 @@
         </p:nvSpPr>
         <p:spPr>
           <a:xfrm>
-            <a:off x="2445004" y="3804031"/>
+            <a:off x="2500139" y="3748896"/>
             <a:ext cx="763524" cy="349250"/>
           </a:xfrm>
           <a:prstGeom prst="rect">
@@ -3776,7 +3776,7 @@
         </p:nvSpPr>
         <p:spPr>
           <a:xfrm>
-            <a:off x="3251708" y="2997327"/>
+            <a:off x="3196573" y="3052462"/>
             <a:ext cx="763524" cy="349250"/>
           </a:xfrm>
           <a:prstGeom prst="rect">
@@ -4607,8 +4607,8 @@
         </p:nvSpPr>
         <p:spPr>
           <a:xfrm>
-            <a:off x="2119122" y="2346960"/>
-            <a:ext cx="3017520" cy="1341120"/>
+            <a:off x="2360524" y="2454250"/>
+            <a:ext cx="2534717" cy="1126541"/>
           </a:xfrm>
           <a:custGeom>
             <a:avLst/>
@@ -4617,18 +4617,18 @@
             <a:cxnLst/>
             <a:rect l="l" t="t" r="r" b="b"/>
             <a:pathLst>
-              <a:path w="3017520" h="1341120">
+              <a:path w="2534717" h="1126541">
                 <a:moveTo>
-                  <a:pt x="0" y="1341120"/>
+                  <a:pt x="0" y="1126541"/>
                 </a:moveTo>
                 <a:lnTo>
-                  <a:pt x="3017520" y="1341120"/>
+                  <a:pt x="2534717" y="1126541"/>
                 </a:lnTo>
                 <a:lnTo>
-                  <a:pt x="2346960" y="0"/>
+                  <a:pt x="1971446" y="0"/>
                 </a:lnTo>
                 <a:lnTo>
-                  <a:pt x="670560" y="0"/>
+                  <a:pt x="563270" y="0"/>
                 </a:lnTo>
                 <a:close/>
               </a:path>
@@ -4653,7 +4653,7 @@
         </p:nvSpPr>
         <p:spPr>
           <a:xfrm>
-            <a:off x="2789682" y="3478530"/>
+            <a:off x="2923794" y="3371240"/>
             <a:ext cx="209550" cy="209550"/>
           </a:xfrm>
           <a:custGeom>
@@ -4693,8 +4693,8 @@
         </p:nvSpPr>
         <p:spPr>
           <a:xfrm>
-            <a:off x="2789682" y="2346960"/>
-            <a:ext cx="0" cy="1341120"/>
+            <a:off x="2923794" y="2454250"/>
+            <a:ext cx="0" cy="1126541"/>
           </a:xfrm>
           <a:prstGeom prst="line">
             <a:avLst/>
@@ -4716,7 +4716,7 @@
         </p:nvSpPr>
         <p:spPr>
           <a:xfrm>
-            <a:off x="3246120" y="3764915"/>
+            <a:off x="3246120" y="3657625"/>
             <a:ext cx="763524" cy="349250"/>
           </a:xfrm>
           <a:prstGeom prst="rect">
@@ -4755,7 +4755,7 @@
         </p:nvSpPr>
         <p:spPr>
           <a:xfrm>
-            <a:off x="3246120" y="1920875"/>
+            <a:off x="3246120" y="2028165"/>
             <a:ext cx="763524" cy="349250"/>
           </a:xfrm>
           <a:prstGeom prst="rect">
@@ -4794,7 +4794,7 @@
         </p:nvSpPr>
         <p:spPr>
           <a:xfrm>
-            <a:off x="2838196" y="2842895"/>
+            <a:off x="2972308" y="2842895"/>
             <a:ext cx="763524" cy="349250"/>
           </a:xfrm>
           <a:prstGeom prst="rect">
@@ -8015,8 +8015,8 @@
         </p:nvSpPr>
         <p:spPr>
           <a:xfrm>
-            <a:off x="1353160" y="3068041"/>
-            <a:ext cx="2815438" cy="1407719"/>
+            <a:off x="1485483" y="3117662"/>
+            <a:ext cx="2616952" cy="1308476"/>
           </a:xfrm>
           <a:custGeom>
             <a:avLst/>
@@ -8025,15 +8025,15 @@
             <a:cxnLst/>
             <a:rect l="l" t="t" r="r" b="b"/>
             <a:pathLst>
-              <a:path w="2815438" h="1407719">
+              <a:path w="2616952" h="1308476">
                 <a:moveTo>
-                  <a:pt x="0" y="1407719"/>
+                  <a:pt x="0" y="1308476"/>
                 </a:moveTo>
                 <a:lnTo>
-                  <a:pt x="2815438" y="1407719"/>
+                  <a:pt x="2616952" y="1308476"/>
                 </a:lnTo>
                 <a:lnTo>
-                  <a:pt x="938479" y="0"/>
+                  <a:pt x="872317" y="0"/>
                 </a:lnTo>
                 <a:close/>
               </a:path>
@@ -8053,8 +8053,8 @@
         </p:nvSpPr>
         <p:spPr>
           <a:xfrm>
-            <a:off x="2291639" y="3068041"/>
-            <a:ext cx="2815438" cy="1407719"/>
+            <a:off x="2357801" y="3117662"/>
+            <a:ext cx="2616952" cy="1308476"/>
           </a:xfrm>
           <a:custGeom>
             <a:avLst/>
@@ -8063,12 +8063,12 @@
             <a:cxnLst/>
             <a:rect l="l" t="t" r="r" b="b"/>
             <a:pathLst>
-              <a:path w="2815438" h="1407719">
+              <a:path w="2616952" h="1308476">
                 <a:moveTo>
-                  <a:pt x="1876958" y="1407719"/>
+                  <a:pt x="1744635" y="1308476"/>
                 </a:moveTo>
                 <a:lnTo>
-                  <a:pt x="2815438" y="0"/>
+                  <a:pt x="2616952" y="0"/>
                 </a:lnTo>
                 <a:lnTo>
                   <a:pt x="0" y="0"/>
@@ -8091,8 +8091,8 @@
         </p:nvSpPr>
         <p:spPr>
           <a:xfrm flipV="1">
-            <a:off x="883920" y="2598801"/>
-            <a:ext cx="0" cy="2346198"/>
+            <a:off x="1049325" y="2681503"/>
+            <a:ext cx="0" cy="2180793"/>
           </a:xfrm>
           <a:prstGeom prst="line">
             <a:avLst/>
@@ -8114,8 +8114,8 @@
         </p:nvSpPr>
         <p:spPr>
           <a:xfrm flipV="1">
-            <a:off x="1353160" y="2598801"/>
-            <a:ext cx="0" cy="2346198"/>
+            <a:off x="1485483" y="2681503"/>
+            <a:ext cx="0" cy="2180793"/>
           </a:xfrm>
           <a:prstGeom prst="line">
             <a:avLst/>
@@ -8137,8 +8137,8 @@
         </p:nvSpPr>
         <p:spPr>
           <a:xfrm flipV="1">
-            <a:off x="1822399" y="2598801"/>
-            <a:ext cx="0" cy="2346198"/>
+            <a:off x="1921642" y="2681503"/>
+            <a:ext cx="0" cy="2180793"/>
           </a:xfrm>
           <a:prstGeom prst="line">
             <a:avLst/>
@@ -8160,8 +8160,8 @@
         </p:nvSpPr>
         <p:spPr>
           <a:xfrm flipV="1">
-            <a:off x="2291639" y="2598801"/>
-            <a:ext cx="0" cy="2346198"/>
+            <a:off x="2357801" y="2681503"/>
+            <a:ext cx="0" cy="2180793"/>
           </a:xfrm>
           <a:prstGeom prst="line">
             <a:avLst/>
@@ -8183,8 +8183,8 @@
         </p:nvSpPr>
         <p:spPr>
           <a:xfrm flipV="1">
-            <a:off x="2760878" y="2598801"/>
-            <a:ext cx="0" cy="2346198"/>
+            <a:off x="2793959" y="2681503"/>
+            <a:ext cx="0" cy="2180793"/>
           </a:xfrm>
           <a:prstGeom prst="line">
             <a:avLst/>
@@ -8206,8 +8206,8 @@
         </p:nvSpPr>
         <p:spPr>
           <a:xfrm flipV="1">
-            <a:off x="3230118" y="2598801"/>
-            <a:ext cx="0" cy="2346198"/>
+            <a:off x="3230118" y="2681503"/>
+            <a:ext cx="0" cy="2180793"/>
           </a:xfrm>
           <a:prstGeom prst="line">
             <a:avLst/>
@@ -8229,8 +8229,8 @@
         </p:nvSpPr>
         <p:spPr>
           <a:xfrm flipV="1">
-            <a:off x="3699358" y="2598801"/>
-            <a:ext cx="0" cy="2346198"/>
+            <a:off x="3666277" y="2681503"/>
+            <a:ext cx="0" cy="2180793"/>
           </a:xfrm>
           <a:prstGeom prst="line">
             <a:avLst/>
@@ -8252,8 +8252,8 @@
         </p:nvSpPr>
         <p:spPr>
           <a:xfrm flipV="1">
-            <a:off x="4168597" y="2598801"/>
-            <a:ext cx="0" cy="2346198"/>
+            <a:off x="4102435" y="2681503"/>
+            <a:ext cx="0" cy="2180793"/>
           </a:xfrm>
           <a:prstGeom prst="line">
             <a:avLst/>
@@ -8275,8 +8275,8 @@
         </p:nvSpPr>
         <p:spPr>
           <a:xfrm flipV="1">
-            <a:off x="4637837" y="2598801"/>
-            <a:ext cx="0" cy="2346198"/>
+            <a:off x="4538594" y="2681503"/>
+            <a:ext cx="0" cy="2180793"/>
           </a:xfrm>
           <a:prstGeom prst="line">
             <a:avLst/>
@@ -8298,8 +8298,8 @@
         </p:nvSpPr>
         <p:spPr>
           <a:xfrm flipV="1">
-            <a:off x="5107076" y="2598801"/>
-            <a:ext cx="0" cy="2346198"/>
+            <a:off x="4974753" y="2681503"/>
+            <a:ext cx="0" cy="2180793"/>
           </a:xfrm>
           <a:prstGeom prst="line">
             <a:avLst/>
@@ -8321,8 +8321,8 @@
         </p:nvSpPr>
         <p:spPr>
           <a:xfrm flipV="1">
-            <a:off x="5576316" y="2598801"/>
-            <a:ext cx="0" cy="2346198"/>
+            <a:off x="5410911" y="2681503"/>
+            <a:ext cx="0" cy="2180793"/>
           </a:xfrm>
           <a:prstGeom prst="line">
             <a:avLst/>
@@ -8344,8 +8344,8 @@
         </p:nvSpPr>
         <p:spPr>
           <a:xfrm>
-            <a:off x="883920" y="4944999"/>
-            <a:ext cx="4692396" cy="0"/>
+            <a:off x="1049325" y="4862297"/>
+            <a:ext cx="4361586" cy="0"/>
           </a:xfrm>
           <a:prstGeom prst="line">
             <a:avLst/>
@@ -8367,8 +8367,8 @@
         </p:nvSpPr>
         <p:spPr>
           <a:xfrm>
-            <a:off x="883920" y="4475759"/>
-            <a:ext cx="4692396" cy="0"/>
+            <a:off x="1049325" y="4426138"/>
+            <a:ext cx="4361586" cy="0"/>
           </a:xfrm>
           <a:prstGeom prst="line">
             <a:avLst/>
@@ -8390,8 +8390,8 @@
         </p:nvSpPr>
         <p:spPr>
           <a:xfrm>
-            <a:off x="883920" y="4006520"/>
-            <a:ext cx="4692396" cy="0"/>
+            <a:off x="1049325" y="3989979"/>
+            <a:ext cx="4361586" cy="0"/>
           </a:xfrm>
           <a:prstGeom prst="line">
             <a:avLst/>
@@ -8413,8 +8413,8 @@
         </p:nvSpPr>
         <p:spPr>
           <a:xfrm>
-            <a:off x="883920" y="3537280"/>
-            <a:ext cx="4692396" cy="0"/>
+            <a:off x="1049325" y="3553821"/>
+            <a:ext cx="4361586" cy="0"/>
           </a:xfrm>
           <a:prstGeom prst="line">
             <a:avLst/>
@@ -8436,8 +8436,8 @@
         </p:nvSpPr>
         <p:spPr>
           <a:xfrm>
-            <a:off x="883920" y="3068041"/>
-            <a:ext cx="4692396" cy="0"/>
+            <a:off x="1049325" y="3117662"/>
+            <a:ext cx="4361586" cy="0"/>
           </a:xfrm>
           <a:prstGeom prst="line">
             <a:avLst/>
@@ -8459,8 +8459,8 @@
         </p:nvSpPr>
         <p:spPr>
           <a:xfrm>
-            <a:off x="883920" y="2598801"/>
-            <a:ext cx="4692396" cy="0"/>
+            <a:off x="1049325" y="2681503"/>
+            <a:ext cx="4361586" cy="0"/>
           </a:xfrm>
           <a:prstGeom prst="line">
             <a:avLst/>
@@ -8482,8 +8482,8 @@
         </p:nvSpPr>
         <p:spPr>
           <a:xfrm>
-            <a:off x="1353160" y="3068041"/>
-            <a:ext cx="2815438" cy="1407719"/>
+            <a:off x="1485483" y="3117662"/>
+            <a:ext cx="2616952" cy="1308476"/>
           </a:xfrm>
           <a:custGeom>
             <a:avLst/>
@@ -8492,15 +8492,15 @@
             <a:cxnLst/>
             <a:rect l="l" t="t" r="r" b="b"/>
             <a:pathLst>
-              <a:path w="2815438" h="1407719">
+              <a:path w="2616952" h="1308476">
                 <a:moveTo>
-                  <a:pt x="0" y="1407719"/>
+                  <a:pt x="0" y="1308476"/>
                 </a:moveTo>
                 <a:lnTo>
-                  <a:pt x="2815438" y="1407719"/>
+                  <a:pt x="2616952" y="1308476"/>
                 </a:lnTo>
                 <a:lnTo>
-                  <a:pt x="938479" y="0"/>
+                  <a:pt x="872317" y="0"/>
                 </a:lnTo>
                 <a:close/>
               </a:path>
@@ -8523,8 +8523,8 @@
         </p:nvSpPr>
         <p:spPr>
           <a:xfrm>
-            <a:off x="2291639" y="3068041"/>
-            <a:ext cx="2815438" cy="1407719"/>
+            <a:off x="2357801" y="3117662"/>
+            <a:ext cx="2616952" cy="1308476"/>
           </a:xfrm>
           <a:custGeom>
             <a:avLst/>
@@ -8533,12 +8533,12 @@
             <a:cxnLst/>
             <a:rect l="l" t="t" r="r" b="b"/>
             <a:pathLst>
-              <a:path w="2815438" h="1407719">
+              <a:path w="2616952" h="1308476">
                 <a:moveTo>
-                  <a:pt x="1876958" y="1407719"/>
+                  <a:pt x="1744635" y="1308476"/>
                 </a:moveTo>
                 <a:lnTo>
-                  <a:pt x="2815438" y="0"/>
+                  <a:pt x="2616952" y="0"/>
                 </a:lnTo>
                 <a:lnTo>
                   <a:pt x="0" y="0"/>
@@ -8564,7 +8564,7 @@
         </p:nvSpPr>
         <p:spPr>
           <a:xfrm>
-            <a:off x="2291639" y="4266209"/>
+            <a:off x="2357801" y="4216588"/>
             <a:ext cx="209550" cy="209550"/>
           </a:xfrm>
           <a:custGeom>
@@ -8604,8 +8604,8 @@
         </p:nvSpPr>
         <p:spPr>
           <a:xfrm>
-            <a:off x="2291639" y="3068041"/>
-            <a:ext cx="0" cy="1407719"/>
+            <a:off x="2357801" y="3117662"/>
+            <a:ext cx="0" cy="1308476"/>
           </a:xfrm>
           <a:prstGeom prst="line">
             <a:avLst/>
@@ -8627,7 +8627,7 @@
         </p:nvSpPr>
         <p:spPr>
           <a:xfrm>
-            <a:off x="2379116" y="4552594"/>
+            <a:off x="2412197" y="4502973"/>
             <a:ext cx="763524" cy="349250"/>
           </a:xfrm>
           <a:prstGeom prst="rect">
@@ -8666,7 +8666,7 @@
         </p:nvSpPr>
         <p:spPr>
           <a:xfrm>
-            <a:off x="2340153" y="3597275"/>
+            <a:off x="2406315" y="3597275"/>
             <a:ext cx="763524" cy="349250"/>
           </a:xfrm>
           <a:prstGeom prst="rect">
@@ -9192,8 +9192,8 @@
         </p:nvSpPr>
         <p:spPr>
           <a:xfrm>
-            <a:off x="1842668" y="3397910"/>
-            <a:ext cx="2774899" cy="1040587"/>
+            <a:off x="2107316" y="3497153"/>
+            <a:ext cx="2245604" cy="842101"/>
           </a:xfrm>
           <a:custGeom>
             <a:avLst/>
@@ -9202,18 +9202,18 @@
             <a:cxnLst/>
             <a:rect l="l" t="t" r="r" b="b"/>
             <a:pathLst>
-              <a:path w="2774899" h="1040587">
+              <a:path w="2245604" h="842101">
                 <a:moveTo>
-                  <a:pt x="0" y="1040587"/>
+                  <a:pt x="0" y="842101"/>
                 </a:moveTo>
                 <a:lnTo>
-                  <a:pt x="2081174" y="1040587"/>
+                  <a:pt x="1684203" y="842101"/>
                 </a:lnTo>
                 <a:lnTo>
-                  <a:pt x="2774899" y="0"/>
+                  <a:pt x="2245604" y="0"/>
                 </a:lnTo>
                 <a:lnTo>
-                  <a:pt x="693725" y="0"/>
+                  <a:pt x="561401" y="0"/>
                 </a:lnTo>
                 <a:close/>
               </a:path>
@@ -9233,8 +9233,8 @@
         </p:nvSpPr>
         <p:spPr>
           <a:xfrm flipV="1">
-            <a:off x="1495806" y="3051048"/>
-            <a:ext cx="0" cy="1734312"/>
+            <a:off x="1826616" y="3216453"/>
+            <a:ext cx="0" cy="1403502"/>
           </a:xfrm>
           <a:prstGeom prst="line">
             <a:avLst/>
@@ -9256,8 +9256,8 @@
         </p:nvSpPr>
         <p:spPr>
           <a:xfrm flipV="1">
-            <a:off x="1842668" y="3051048"/>
-            <a:ext cx="0" cy="1734312"/>
+            <a:off x="2107316" y="3216453"/>
+            <a:ext cx="0" cy="1403502"/>
           </a:xfrm>
           <a:prstGeom prst="line">
             <a:avLst/>
@@ -9279,8 +9279,8 @@
         </p:nvSpPr>
         <p:spPr>
           <a:xfrm flipV="1">
-            <a:off x="2189531" y="3051048"/>
-            <a:ext cx="0" cy="1734312"/>
+            <a:off x="2388017" y="3216453"/>
+            <a:ext cx="0" cy="1403502"/>
           </a:xfrm>
           <a:prstGeom prst="line">
             <a:avLst/>
@@ -9302,8 +9302,8 @@
         </p:nvSpPr>
         <p:spPr>
           <a:xfrm flipV="1">
-            <a:off x="2536393" y="3051048"/>
-            <a:ext cx="0" cy="1734312"/>
+            <a:off x="2668717" y="3216453"/>
+            <a:ext cx="0" cy="1403502"/>
           </a:xfrm>
           <a:prstGeom prst="line">
             <a:avLst/>
@@ -9325,8 +9325,8 @@
         </p:nvSpPr>
         <p:spPr>
           <a:xfrm flipV="1">
-            <a:off x="2883256" y="3051048"/>
-            <a:ext cx="0" cy="1734312"/>
+            <a:off x="2949418" y="3216453"/>
+            <a:ext cx="0" cy="1403502"/>
           </a:xfrm>
           <a:prstGeom prst="line">
             <a:avLst/>
@@ -9348,8 +9348,8 @@
         </p:nvSpPr>
         <p:spPr>
           <a:xfrm flipV="1">
-            <a:off x="3230118" y="3051048"/>
-            <a:ext cx="0" cy="1734312"/>
+            <a:off x="3230118" y="3216453"/>
+            <a:ext cx="0" cy="1403502"/>
           </a:xfrm>
           <a:prstGeom prst="line">
             <a:avLst/>
@@ -9371,8 +9371,8 @@
         </p:nvSpPr>
         <p:spPr>
           <a:xfrm flipV="1">
-            <a:off x="3576980" y="3051048"/>
-            <a:ext cx="0" cy="1734312"/>
+            <a:off x="3510818" y="3216453"/>
+            <a:ext cx="0" cy="1403502"/>
           </a:xfrm>
           <a:prstGeom prst="line">
             <a:avLst/>
@@ -9394,8 +9394,8 @@
         </p:nvSpPr>
         <p:spPr>
           <a:xfrm flipV="1">
-            <a:off x="3923843" y="3051048"/>
-            <a:ext cx="0" cy="1734312"/>
+            <a:off x="3791519" y="3216453"/>
+            <a:ext cx="0" cy="1403502"/>
           </a:xfrm>
           <a:prstGeom prst="line">
             <a:avLst/>
@@ -9417,8 +9417,8 @@
         </p:nvSpPr>
         <p:spPr>
           <a:xfrm flipV="1">
-            <a:off x="4270705" y="3051048"/>
-            <a:ext cx="0" cy="1734312"/>
+            <a:off x="4072219" y="3216453"/>
+            <a:ext cx="0" cy="1403502"/>
           </a:xfrm>
           <a:prstGeom prst="line">
             <a:avLst/>
@@ -9440,8 +9440,8 @@
         </p:nvSpPr>
         <p:spPr>
           <a:xfrm flipV="1">
-            <a:off x="4617568" y="3051048"/>
-            <a:ext cx="0" cy="1734312"/>
+            <a:off x="4352920" y="3216453"/>
+            <a:ext cx="0" cy="1403502"/>
           </a:xfrm>
           <a:prstGeom prst="line">
             <a:avLst/>
@@ -9463,8 +9463,8 @@
         </p:nvSpPr>
         <p:spPr>
           <a:xfrm flipV="1">
-            <a:off x="4964430" y="3051048"/>
-            <a:ext cx="0" cy="1734312"/>
+            <a:off x="4633620" y="3216453"/>
+            <a:ext cx="0" cy="1403502"/>
           </a:xfrm>
           <a:prstGeom prst="line">
             <a:avLst/>
@@ -9486,8 +9486,8 @@
         </p:nvSpPr>
         <p:spPr>
           <a:xfrm>
-            <a:off x="1495806" y="4785360"/>
-            <a:ext cx="3468624" cy="0"/>
+            <a:off x="1826616" y="4619955"/>
+            <a:ext cx="2807005" cy="0"/>
           </a:xfrm>
           <a:prstGeom prst="line">
             <a:avLst/>
@@ -9509,8 +9509,8 @@
         </p:nvSpPr>
         <p:spPr>
           <a:xfrm>
-            <a:off x="1495806" y="4438498"/>
-            <a:ext cx="3468624" cy="0"/>
+            <a:off x="1826616" y="4339255"/>
+            <a:ext cx="2807005" cy="0"/>
           </a:xfrm>
           <a:prstGeom prst="line">
             <a:avLst/>
@@ -9532,8 +9532,8 @@
         </p:nvSpPr>
         <p:spPr>
           <a:xfrm>
-            <a:off x="1495806" y="4091635"/>
-            <a:ext cx="3468624" cy="0"/>
+            <a:off x="1826616" y="4058554"/>
+            <a:ext cx="2807005" cy="0"/>
           </a:xfrm>
           <a:prstGeom prst="line">
             <a:avLst/>
@@ -9555,8 +9555,8 @@
         </p:nvSpPr>
         <p:spPr>
           <a:xfrm>
-            <a:off x="1495806" y="3744773"/>
-            <a:ext cx="3468624" cy="0"/>
+            <a:off x="1826616" y="3777854"/>
+            <a:ext cx="2807005" cy="0"/>
           </a:xfrm>
           <a:prstGeom prst="line">
             <a:avLst/>
@@ -9578,8 +9578,8 @@
         </p:nvSpPr>
         <p:spPr>
           <a:xfrm>
-            <a:off x="1495806" y="3397910"/>
-            <a:ext cx="3468624" cy="0"/>
+            <a:off x="1826616" y="3497153"/>
+            <a:ext cx="2807005" cy="0"/>
           </a:xfrm>
           <a:prstGeom prst="line">
             <a:avLst/>
@@ -9601,8 +9601,8 @@
         </p:nvSpPr>
         <p:spPr>
           <a:xfrm>
-            <a:off x="1495806" y="3051048"/>
-            <a:ext cx="3468624" cy="0"/>
+            <a:off x="1826616" y="3216453"/>
+            <a:ext cx="2807005" cy="0"/>
           </a:xfrm>
           <a:prstGeom prst="line">
             <a:avLst/>
@@ -9624,8 +9624,8 @@
         </p:nvSpPr>
         <p:spPr>
           <a:xfrm>
-            <a:off x="1842668" y="3397910"/>
-            <a:ext cx="2774899" cy="1040587"/>
+            <a:off x="2107316" y="3497153"/>
+            <a:ext cx="2245604" cy="842101"/>
           </a:xfrm>
           <a:custGeom>
             <a:avLst/>
@@ -9634,18 +9634,18 @@
             <a:cxnLst/>
             <a:rect l="l" t="t" r="r" b="b"/>
             <a:pathLst>
-              <a:path w="2774899" h="1040587">
+              <a:path w="2245604" h="842101">
                 <a:moveTo>
-                  <a:pt x="0" y="1040587"/>
+                  <a:pt x="0" y="842101"/>
                 </a:moveTo>
                 <a:lnTo>
-                  <a:pt x="2081174" y="1040587"/>
+                  <a:pt x="1684203" y="842101"/>
                 </a:lnTo>
                 <a:lnTo>
-                  <a:pt x="2774899" y="0"/>
+                  <a:pt x="2245604" y="0"/>
                 </a:lnTo>
                 <a:lnTo>
-                  <a:pt x="693725" y="0"/>
+                  <a:pt x="561401" y="0"/>
                 </a:lnTo>
                 <a:close/>
               </a:path>
@@ -9668,7 +9668,7 @@
         </p:nvSpPr>
         <p:spPr>
           <a:xfrm>
-            <a:off x="2536393" y="4228948"/>
+            <a:off x="2668717" y="4129705"/>
             <a:ext cx="209550" cy="209550"/>
           </a:xfrm>
           <a:custGeom>
@@ -9708,8 +9708,8 @@
         </p:nvSpPr>
         <p:spPr>
           <a:xfrm>
-            <a:off x="2536393" y="3397910"/>
-            <a:ext cx="0" cy="1040587"/>
+            <a:off x="2668717" y="3497153"/>
+            <a:ext cx="0" cy="842101"/>
           </a:xfrm>
           <a:prstGeom prst="line">
             <a:avLst/>
@@ -9731,7 +9731,7 @@
         </p:nvSpPr>
         <p:spPr>
           <a:xfrm>
-            <a:off x="2501494" y="4515333"/>
+            <a:off x="2567656" y="4416090"/>
             <a:ext cx="763524" cy="349250"/>
           </a:xfrm>
           <a:prstGeom prst="rect">
@@ -9770,7 +9770,7 @@
         </p:nvSpPr>
         <p:spPr>
           <a:xfrm>
-            <a:off x="2584907" y="3743579"/>
+            <a:off x="2717231" y="3743579"/>
             <a:ext cx="763524" cy="349250"/>
           </a:xfrm>
           <a:prstGeom prst="rect">
@@ -9856,8 +9856,8 @@
         </p:nvSpPr>
         <p:spPr>
           <a:xfrm>
-            <a:off x="8091678" y="3340100"/>
-            <a:ext cx="1734312" cy="1156208"/>
+            <a:off x="8257083" y="3450370"/>
+            <a:ext cx="1403502" cy="935668"/>
           </a:xfrm>
           <a:custGeom>
             <a:avLst/>
@@ -9866,12 +9866,12 @@
             <a:cxnLst/>
             <a:rect l="l" t="t" r="r" b="b"/>
             <a:pathLst>
-              <a:path w="1734312" h="1156208">
+              <a:path w="1403502" h="935668">
                 <a:moveTo>
-                  <a:pt x="0" y="1156208"/>
+                  <a:pt x="0" y="935668"/>
                 </a:moveTo>
                 <a:lnTo>
-                  <a:pt x="1734312" y="1156208"/>
+                  <a:pt x="1403502" y="935668"/>
                 </a:lnTo>
                 <a:lnTo>
                   <a:pt x="0" y="0"/>
@@ -9894,8 +9894,8 @@
         </p:nvSpPr>
         <p:spPr>
           <a:xfrm flipV="1">
-            <a:off x="7802626" y="3051048"/>
-            <a:ext cx="0" cy="1734312"/>
+            <a:off x="8023166" y="3216453"/>
+            <a:ext cx="0" cy="1403502"/>
           </a:xfrm>
           <a:prstGeom prst="line">
             <a:avLst/>
@@ -9917,8 +9917,8 @@
         </p:nvSpPr>
         <p:spPr>
           <a:xfrm flipV="1">
-            <a:off x="8091678" y="3051048"/>
-            <a:ext cx="0" cy="1734312"/>
+            <a:off x="8257083" y="3216453"/>
+            <a:ext cx="0" cy="1403502"/>
           </a:xfrm>
           <a:prstGeom prst="line">
             <a:avLst/>
@@ -9940,8 +9940,8 @@
         </p:nvSpPr>
         <p:spPr>
           <a:xfrm flipV="1">
-            <a:off x="8380730" y="3051048"/>
-            <a:ext cx="0" cy="1734312"/>
+            <a:off x="8491000" y="3216453"/>
+            <a:ext cx="0" cy="1403502"/>
           </a:xfrm>
           <a:prstGeom prst="line">
             <a:avLst/>
@@ -9963,8 +9963,8 @@
         </p:nvSpPr>
         <p:spPr>
           <a:xfrm flipV="1">
-            <a:off x="8669782" y="3051048"/>
-            <a:ext cx="0" cy="1734312"/>
+            <a:off x="8724917" y="3216453"/>
+            <a:ext cx="0" cy="1403502"/>
           </a:xfrm>
           <a:prstGeom prst="line">
             <a:avLst/>
@@ -9986,8 +9986,8 @@
         </p:nvSpPr>
         <p:spPr>
           <a:xfrm flipV="1">
-            <a:off x="8958834" y="3051048"/>
-            <a:ext cx="0" cy="1734312"/>
+            <a:off x="8958834" y="3216453"/>
+            <a:ext cx="0" cy="1403502"/>
           </a:xfrm>
           <a:prstGeom prst="line">
             <a:avLst/>
@@ -10009,8 +10009,8 @@
         </p:nvSpPr>
         <p:spPr>
           <a:xfrm flipV="1">
-            <a:off x="9247886" y="3051048"/>
-            <a:ext cx="0" cy="1734312"/>
+            <a:off x="9192751" y="3216453"/>
+            <a:ext cx="0" cy="1403502"/>
           </a:xfrm>
           <a:prstGeom prst="line">
             <a:avLst/>
@@ -10032,8 +10032,8 @@
         </p:nvSpPr>
         <p:spPr>
           <a:xfrm flipV="1">
-            <a:off x="9536938" y="3051048"/>
-            <a:ext cx="0" cy="1734312"/>
+            <a:off x="9426668" y="3216453"/>
+            <a:ext cx="0" cy="1403502"/>
           </a:xfrm>
           <a:prstGeom prst="line">
             <a:avLst/>
@@ -10055,8 +10055,8 @@
         </p:nvSpPr>
         <p:spPr>
           <a:xfrm flipV="1">
-            <a:off x="9825990" y="3051048"/>
-            <a:ext cx="0" cy="1734312"/>
+            <a:off x="9660585" y="3216453"/>
+            <a:ext cx="0" cy="1403502"/>
           </a:xfrm>
           <a:prstGeom prst="line">
             <a:avLst/>
@@ -10078,8 +10078,8 @@
         </p:nvSpPr>
         <p:spPr>
           <a:xfrm flipV="1">
-            <a:off x="10115042" y="3051048"/>
-            <a:ext cx="0" cy="1734312"/>
+            <a:off x="9894502" y="3216453"/>
+            <a:ext cx="0" cy="1403502"/>
           </a:xfrm>
           <a:prstGeom prst="line">
             <a:avLst/>
@@ -10101,8 +10101,8 @@
         </p:nvSpPr>
         <p:spPr>
           <a:xfrm>
-            <a:off x="7802626" y="4785360"/>
-            <a:ext cx="2312416" cy="0"/>
+            <a:off x="8023166" y="4619955"/>
+            <a:ext cx="1871337" cy="0"/>
           </a:xfrm>
           <a:prstGeom prst="line">
             <a:avLst/>
@@ -10124,8 +10124,8 @@
         </p:nvSpPr>
         <p:spPr>
           <a:xfrm>
-            <a:off x="7802626" y="4496308"/>
-            <a:ext cx="2312416" cy="0"/>
+            <a:off x="8023166" y="4386038"/>
+            <a:ext cx="1871337" cy="0"/>
           </a:xfrm>
           <a:prstGeom prst="line">
             <a:avLst/>
@@ -10147,8 +10147,8 @@
         </p:nvSpPr>
         <p:spPr>
           <a:xfrm>
-            <a:off x="7802626" y="4207256"/>
-            <a:ext cx="2312416" cy="0"/>
+            <a:off x="8023166" y="4152121"/>
+            <a:ext cx="1871337" cy="0"/>
           </a:xfrm>
           <a:prstGeom prst="line">
             <a:avLst/>
@@ -10170,8 +10170,8 @@
         </p:nvSpPr>
         <p:spPr>
           <a:xfrm>
-            <a:off x="7802626" y="3918204"/>
-            <a:ext cx="2312416" cy="0"/>
+            <a:off x="8023166" y="3918204"/>
+            <a:ext cx="1871337" cy="0"/>
           </a:xfrm>
           <a:prstGeom prst="line">
             <a:avLst/>
@@ -10193,8 +10193,8 @@
         </p:nvSpPr>
         <p:spPr>
           <a:xfrm>
-            <a:off x="7802626" y="3629152"/>
-            <a:ext cx="2312416" cy="0"/>
+            <a:off x="8023166" y="3684287"/>
+            <a:ext cx="1871337" cy="0"/>
           </a:xfrm>
           <a:prstGeom prst="line">
             <a:avLst/>
@@ -10216,8 +10216,8 @@
         </p:nvSpPr>
         <p:spPr>
           <a:xfrm>
-            <a:off x="7802626" y="3340100"/>
-            <a:ext cx="2312416" cy="0"/>
+            <a:off x="8023166" y="3450370"/>
+            <a:ext cx="1871337" cy="0"/>
           </a:xfrm>
           <a:prstGeom prst="line">
             <a:avLst/>
@@ -10239,8 +10239,8 @@
         </p:nvSpPr>
         <p:spPr>
           <a:xfrm>
-            <a:off x="7802626" y="3051048"/>
-            <a:ext cx="2312416" cy="0"/>
+            <a:off x="8023166" y="3216453"/>
+            <a:ext cx="1871337" cy="0"/>
           </a:xfrm>
           <a:prstGeom prst="line">
             <a:avLst/>
@@ -10262,8 +10262,8 @@
         </p:nvSpPr>
         <p:spPr>
           <a:xfrm>
-            <a:off x="8091678" y="3340100"/>
-            <a:ext cx="1734312" cy="1156208"/>
+            <a:off x="8257083" y="3450370"/>
+            <a:ext cx="1403502" cy="935668"/>
           </a:xfrm>
           <a:custGeom>
             <a:avLst/>
@@ -10272,12 +10272,12 @@
             <a:cxnLst/>
             <a:rect l="l" t="t" r="r" b="b"/>
             <a:pathLst>
-              <a:path w="1734312" h="1156208">
+              <a:path w="1403502" h="935668">
                 <a:moveTo>
-                  <a:pt x="0" y="1156208"/>
+                  <a:pt x="0" y="935668"/>
                 </a:moveTo>
                 <a:lnTo>
-                  <a:pt x="1734312" y="1156208"/>
+                  <a:pt x="1403502" y="935668"/>
                 </a:lnTo>
                 <a:lnTo>
                   <a:pt x="0" y="0"/>
@@ -10303,7 +10303,7 @@
         </p:nvSpPr>
         <p:spPr>
           <a:xfrm>
-            <a:off x="8091678" y="4286758"/>
+            <a:off x="8257083" y="4176488"/>
             <a:ext cx="209550" cy="209550"/>
           </a:xfrm>
           <a:custGeom>
@@ -10343,7 +10343,7 @@
         </p:nvSpPr>
         <p:spPr>
           <a:xfrm>
-            <a:off x="8577072" y="4573143"/>
+            <a:off x="8577072" y="4462873"/>
             <a:ext cx="763524" cy="349250"/>
           </a:xfrm>
           <a:prstGeom prst="rect">
@@ -10382,7 +10382,7 @@
         </p:nvSpPr>
         <p:spPr>
           <a:xfrm>
-            <a:off x="7279640" y="3743579"/>
+            <a:off x="7445045" y="3743579"/>
             <a:ext cx="763524" cy="349250"/>
           </a:xfrm>
           <a:prstGeom prst="rect">
@@ -10535,8 +10535,8 @@
         </p:nvSpPr>
         <p:spPr>
           <a:xfrm>
-            <a:off x="944118" y="1943100"/>
-            <a:ext cx="4572000" cy="3657600"/>
+            <a:off x="1100734" y="2068393"/>
+            <a:ext cx="4258767" cy="3407014"/>
           </a:xfrm>
           <a:custGeom>
             <a:avLst/>
@@ -10545,18 +10545,18 @@
             <a:cxnLst/>
             <a:rect l="l" t="t" r="r" b="b"/>
             <a:pathLst>
-              <a:path w="4572000" h="3657600">
+              <a:path w="4258767" h="3407014">
                 <a:moveTo>
-                  <a:pt x="0" y="3657600"/>
+                  <a:pt x="0" y="3407014"/>
                 </a:moveTo>
                 <a:lnTo>
-                  <a:pt x="4572000" y="3657600"/>
+                  <a:pt x="4258767" y="3407014"/>
                 </a:lnTo>
                 <a:lnTo>
-                  <a:pt x="3657600" y="0"/>
+                  <a:pt x="3407014" y="0"/>
                 </a:lnTo>
                 <a:lnTo>
-                  <a:pt x="914400" y="0"/>
+                  <a:pt x="851753" y="0"/>
                 </a:lnTo>
                 <a:close/>
               </a:path>
@@ -10581,7 +10581,7 @@
         </p:nvSpPr>
         <p:spPr>
           <a:xfrm>
-            <a:off x="2772918" y="5391150"/>
+            <a:off x="2804241" y="5265857"/>
             <a:ext cx="209550" cy="209550"/>
           </a:xfrm>
           <a:custGeom>
@@ -10621,8 +10621,8 @@
         </p:nvSpPr>
         <p:spPr>
           <a:xfrm>
-            <a:off x="2772918" y="1943100"/>
-            <a:ext cx="0" cy="3657600"/>
+            <a:off x="2804241" y="2068393"/>
+            <a:ext cx="0" cy="3407014"/>
           </a:xfrm>
           <a:prstGeom prst="line">
             <a:avLst/>
@@ -10644,7 +10644,7 @@
         </p:nvSpPr>
         <p:spPr>
           <a:xfrm>
-            <a:off x="2764536" y="5677535"/>
+            <a:off x="2764536" y="5552242"/>
             <a:ext cx="931164" cy="349250"/>
           </a:xfrm>
           <a:prstGeom prst="rect">
@@ -10683,7 +10683,7 @@
         </p:nvSpPr>
         <p:spPr>
           <a:xfrm>
-            <a:off x="2901442" y="1517015"/>
+            <a:off x="2901442" y="1642308"/>
             <a:ext cx="657352" cy="349250"/>
           </a:xfrm>
           <a:prstGeom prst="rect">
@@ -10722,7 +10722,7 @@
         </p:nvSpPr>
         <p:spPr>
           <a:xfrm>
-            <a:off x="2801874" y="3597275"/>
+            <a:off x="2833197" y="3597275"/>
             <a:ext cx="657352" cy="349250"/>
           </a:xfrm>
           <a:prstGeom prst="rect">
@@ -11093,8 +11093,8 @@
         </p:nvSpPr>
         <p:spPr>
           <a:xfrm>
-            <a:off x="7039217" y="2918737"/>
-            <a:ext cx="2132907" cy="1706326"/>
+            <a:off x="7174549" y="2978884"/>
+            <a:ext cx="1982539" cy="1586031"/>
           </a:xfrm>
           <a:custGeom>
             <a:avLst/>
@@ -11103,18 +11103,18 @@
             <a:cxnLst/>
             <a:rect l="l" t="t" r="r" b="b"/>
             <a:pathLst>
-              <a:path w="2132907" h="1706326">
+              <a:path w="1982539" h="1586031">
                 <a:moveTo>
-                  <a:pt x="0" y="1706326"/>
+                  <a:pt x="0" y="1586031"/>
                 </a:moveTo>
                 <a:lnTo>
-                  <a:pt x="2132907" y="1706326"/>
+                  <a:pt x="1982539" y="1586031"/>
                 </a:lnTo>
                 <a:lnTo>
-                  <a:pt x="1706326" y="0"/>
+                  <a:pt x="1586031" y="0"/>
                 </a:lnTo>
                 <a:lnTo>
-                  <a:pt x="426581" y="0"/>
+                  <a:pt x="396508" y="0"/>
                 </a:lnTo>
                 <a:close/>
               </a:path>
@@ -11134,8 +11134,8 @@
         </p:nvSpPr>
         <p:spPr>
           <a:xfrm>
-            <a:off x="8745543" y="2918737"/>
-            <a:ext cx="2132907" cy="1706326"/>
+            <a:off x="8760580" y="2978884"/>
+            <a:ext cx="1982539" cy="1586031"/>
           </a:xfrm>
           <a:custGeom>
             <a:avLst/>
@@ -11144,15 +11144,15 @@
             <a:cxnLst/>
             <a:rect l="l" t="t" r="r" b="b"/>
             <a:pathLst>
-              <a:path w="2132907" h="1706326">
+              <a:path w="1982539" h="1586031">
                 <a:moveTo>
-                  <a:pt x="426581" y="1706326"/>
+                  <a:pt x="396508" y="1586031"/>
                 </a:moveTo>
                 <a:lnTo>
-                  <a:pt x="1706326" y="1706326"/>
+                  <a:pt x="1586031" y="1586031"/>
                 </a:lnTo>
                 <a:lnTo>
-                  <a:pt x="2132907" y="0"/>
+                  <a:pt x="1982539" y="0"/>
                 </a:lnTo>
                 <a:lnTo>
                   <a:pt x="0" y="0"/>
@@ -11175,8 +11175,8 @@
         </p:nvSpPr>
         <p:spPr>
           <a:xfrm flipV="1">
-            <a:off x="6612636" y="2492156"/>
-            <a:ext cx="0" cy="2559489"/>
+            <a:off x="6778041" y="2582376"/>
+            <a:ext cx="0" cy="2379047"/>
           </a:xfrm>
           <a:prstGeom prst="line">
             <a:avLst/>
@@ -11198,8 +11198,8 @@
         </p:nvSpPr>
         <p:spPr>
           <a:xfrm flipV="1">
-            <a:off x="7039217" y="2492156"/>
-            <a:ext cx="0" cy="2559489"/>
+            <a:off x="7174549" y="2582376"/>
+            <a:ext cx="0" cy="2379047"/>
           </a:xfrm>
           <a:prstGeom prst="line">
             <a:avLst/>
@@ -11221,8 +11221,8 @@
         </p:nvSpPr>
         <p:spPr>
           <a:xfrm flipV="1">
-            <a:off x="7465799" y="2492156"/>
-            <a:ext cx="0" cy="2559489"/>
+            <a:off x="7571057" y="2582376"/>
+            <a:ext cx="0" cy="2379047"/>
           </a:xfrm>
           <a:prstGeom prst="line">
             <a:avLst/>
@@ -11244,8 +11244,8 @@
         </p:nvSpPr>
         <p:spPr>
           <a:xfrm flipV="1">
-            <a:off x="7892380" y="2492156"/>
-            <a:ext cx="0" cy="2559489"/>
+            <a:off x="7967564" y="2582376"/>
+            <a:ext cx="0" cy="2379047"/>
           </a:xfrm>
           <a:prstGeom prst="line">
             <a:avLst/>
@@ -11267,8 +11267,8 @@
         </p:nvSpPr>
         <p:spPr>
           <a:xfrm flipV="1">
-            <a:off x="8318962" y="2492156"/>
-            <a:ext cx="0" cy="2559489"/>
+            <a:off x="8364072" y="2582376"/>
+            <a:ext cx="0" cy="2379047"/>
           </a:xfrm>
           <a:prstGeom prst="line">
             <a:avLst/>
@@ -11290,8 +11290,8 @@
         </p:nvSpPr>
         <p:spPr>
           <a:xfrm flipV="1">
-            <a:off x="8745543" y="2492156"/>
-            <a:ext cx="0" cy="2559489"/>
+            <a:off x="8760580" y="2582376"/>
+            <a:ext cx="0" cy="2379047"/>
           </a:xfrm>
           <a:prstGeom prst="line">
             <a:avLst/>
@@ -11313,8 +11313,8 @@
         </p:nvSpPr>
         <p:spPr>
           <a:xfrm flipV="1">
-            <a:off x="9172125" y="2492156"/>
-            <a:ext cx="0" cy="2559489"/>
+            <a:off x="9157088" y="2582376"/>
+            <a:ext cx="0" cy="2379047"/>
           </a:xfrm>
           <a:prstGeom prst="line">
             <a:avLst/>
@@ -11336,8 +11336,8 @@
         </p:nvSpPr>
         <p:spPr>
           <a:xfrm flipV="1">
-            <a:off x="9598706" y="2492156"/>
-            <a:ext cx="0" cy="2559489"/>
+            <a:off x="9553596" y="2582376"/>
+            <a:ext cx="0" cy="2379047"/>
           </a:xfrm>
           <a:prstGeom prst="line">
             <a:avLst/>
@@ -11359,8 +11359,8 @@
         </p:nvSpPr>
         <p:spPr>
           <a:xfrm flipV="1">
-            <a:off x="10025288" y="2492156"/>
-            <a:ext cx="0" cy="2559489"/>
+            <a:off x="9950104" y="2582376"/>
+            <a:ext cx="0" cy="2379047"/>
           </a:xfrm>
           <a:prstGeom prst="line">
             <a:avLst/>
@@ -11382,8 +11382,8 @@
         </p:nvSpPr>
         <p:spPr>
           <a:xfrm flipV="1">
-            <a:off x="10451869" y="2492156"/>
-            <a:ext cx="0" cy="2559489"/>
+            <a:off x="10346611" y="2582376"/>
+            <a:ext cx="0" cy="2379047"/>
           </a:xfrm>
           <a:prstGeom prst="line">
             <a:avLst/>
@@ -11405,8 +11405,8 @@
         </p:nvSpPr>
         <p:spPr>
           <a:xfrm flipV="1">
-            <a:off x="10878451" y="2492156"/>
-            <a:ext cx="0" cy="2559489"/>
+            <a:off x="10743119" y="2582376"/>
+            <a:ext cx="0" cy="2379047"/>
           </a:xfrm>
           <a:prstGeom prst="line">
             <a:avLst/>
@@ -11428,8 +11428,8 @@
         </p:nvSpPr>
         <p:spPr>
           <a:xfrm flipV="1">
-            <a:off x="11305032" y="2492156"/>
-            <a:ext cx="0" cy="2559489"/>
+            <a:off x="11139627" y="2582376"/>
+            <a:ext cx="0" cy="2379047"/>
           </a:xfrm>
           <a:prstGeom prst="line">
             <a:avLst/>
@@ -11451,8 +11451,8 @@
         </p:nvSpPr>
         <p:spPr>
           <a:xfrm>
-            <a:off x="6612636" y="5051644"/>
-            <a:ext cx="4692396" cy="0"/>
+            <a:off x="6778041" y="4961424"/>
+            <a:ext cx="4361586" cy="0"/>
           </a:xfrm>
           <a:prstGeom prst="line">
             <a:avLst/>
@@ -11474,8 +11474,8 @@
         </p:nvSpPr>
         <p:spPr>
           <a:xfrm>
-            <a:off x="6612636" y="4625063"/>
-            <a:ext cx="4692396" cy="0"/>
+            <a:off x="6778041" y="4564916"/>
+            <a:ext cx="4361586" cy="0"/>
           </a:xfrm>
           <a:prstGeom prst="line">
             <a:avLst/>
@@ -11497,8 +11497,8 @@
         </p:nvSpPr>
         <p:spPr>
           <a:xfrm>
-            <a:off x="6612636" y="4198481"/>
-            <a:ext cx="4692396" cy="0"/>
+            <a:off x="6778041" y="4168408"/>
+            <a:ext cx="4361586" cy="0"/>
           </a:xfrm>
           <a:prstGeom prst="line">
             <a:avLst/>
@@ -11520,8 +11520,8 @@
         </p:nvSpPr>
         <p:spPr>
           <a:xfrm>
-            <a:off x="6612636" y="3771900"/>
-            <a:ext cx="4692396" cy="0"/>
+            <a:off x="6778041" y="3771900"/>
+            <a:ext cx="4361586" cy="0"/>
           </a:xfrm>
           <a:prstGeom prst="line">
             <a:avLst/>
@@ -11543,8 +11543,8 @@
         </p:nvSpPr>
         <p:spPr>
           <a:xfrm>
-            <a:off x="6612636" y="3345319"/>
-            <a:ext cx="4692396" cy="0"/>
+            <a:off x="6778041" y="3375392"/>
+            <a:ext cx="4361586" cy="0"/>
           </a:xfrm>
           <a:prstGeom prst="line">
             <a:avLst/>
@@ -11566,8 +11566,8 @@
         </p:nvSpPr>
         <p:spPr>
           <a:xfrm>
-            <a:off x="6612636" y="2918737"/>
-            <a:ext cx="4692396" cy="0"/>
+            <a:off x="6778041" y="2978884"/>
+            <a:ext cx="4361586" cy="0"/>
           </a:xfrm>
           <a:prstGeom prst="line">
             <a:avLst/>
@@ -11589,8 +11589,8 @@
         </p:nvSpPr>
         <p:spPr>
           <a:xfrm>
-            <a:off x="6612636" y="2492156"/>
-            <a:ext cx="4692396" cy="0"/>
+            <a:off x="6778041" y="2582376"/>
+            <a:ext cx="4361586" cy="0"/>
           </a:xfrm>
           <a:prstGeom prst="line">
             <a:avLst/>
@@ -11612,8 +11612,8 @@
         </p:nvSpPr>
         <p:spPr>
           <a:xfrm>
-            <a:off x="7039217" y="2918737"/>
-            <a:ext cx="2132907" cy="1706326"/>
+            <a:off x="7174549" y="2978884"/>
+            <a:ext cx="1982539" cy="1586031"/>
           </a:xfrm>
           <a:custGeom>
             <a:avLst/>
@@ -11622,18 +11622,18 @@
             <a:cxnLst/>
             <a:rect l="l" t="t" r="r" b="b"/>
             <a:pathLst>
-              <a:path w="2132907" h="1706326">
+              <a:path w="1982539" h="1586031">
                 <a:moveTo>
-                  <a:pt x="0" y="1706326"/>
+                  <a:pt x="0" y="1586031"/>
                 </a:moveTo>
                 <a:lnTo>
-                  <a:pt x="2132907" y="1706326"/>
+                  <a:pt x="1982539" y="1586031"/>
                 </a:lnTo>
                 <a:lnTo>
-                  <a:pt x="1706326" y="0"/>
+                  <a:pt x="1586031" y="0"/>
                 </a:lnTo>
                 <a:lnTo>
-                  <a:pt x="426581" y="0"/>
+                  <a:pt x="396508" y="0"/>
                 </a:lnTo>
                 <a:close/>
               </a:path>
@@ -11656,8 +11656,8 @@
         </p:nvSpPr>
         <p:spPr>
           <a:xfrm>
-            <a:off x="8745543" y="2918737"/>
-            <a:ext cx="2132907" cy="1706326"/>
+            <a:off x="8760580" y="2978884"/>
+            <a:ext cx="1982539" cy="1586031"/>
           </a:xfrm>
           <a:custGeom>
             <a:avLst/>
@@ -11666,15 +11666,15 @@
             <a:cxnLst/>
             <a:rect l="l" t="t" r="r" b="b"/>
             <a:pathLst>
-              <a:path w="2132907" h="1706326">
+              <a:path w="1982539" h="1586031">
                 <a:moveTo>
-                  <a:pt x="426581" y="1706326"/>
+                  <a:pt x="396508" y="1586031"/>
                 </a:moveTo>
                 <a:lnTo>
-                  <a:pt x="1706326" y="1706326"/>
+                  <a:pt x="1586031" y="1586031"/>
                 </a:lnTo>
                 <a:lnTo>
-                  <a:pt x="2132907" y="0"/>
+                  <a:pt x="1982539" y="0"/>
                 </a:lnTo>
                 <a:lnTo>
                   <a:pt x="0" y="0"/>
@@ -11700,7 +11700,7 @@
         </p:nvSpPr>
         <p:spPr>
           <a:xfrm>
-            <a:off x="7892380" y="4415513"/>
+            <a:off x="7967564" y="4355366"/>
             <a:ext cx="209550" cy="209550"/>
           </a:xfrm>
           <a:custGeom>
@@ -11740,8 +11740,8 @@
         </p:nvSpPr>
         <p:spPr>
           <a:xfrm>
-            <a:off x="7892380" y="2918737"/>
-            <a:ext cx="0" cy="1706326"/>
+            <a:off x="7967564" y="2978884"/>
+            <a:ext cx="0" cy="1586031"/>
           </a:xfrm>
           <a:prstGeom prst="line">
             <a:avLst/>
@@ -11763,7 +11763,7 @@
         </p:nvSpPr>
         <p:spPr>
           <a:xfrm>
-            <a:off x="7723909" y="4701898"/>
+            <a:off x="7784056" y="4641751"/>
             <a:ext cx="763524" cy="349250"/>
           </a:xfrm>
           <a:prstGeom prst="rect">
@@ -11802,7 +11802,7 @@
         </p:nvSpPr>
         <p:spPr>
           <a:xfrm>
-            <a:off x="7723909" y="2492652"/>
+            <a:off x="7784056" y="2552799"/>
             <a:ext cx="763524" cy="349250"/>
           </a:xfrm>
           <a:prstGeom prst="rect">
@@ -11841,7 +11841,7 @@
         </p:nvSpPr>
         <p:spPr>
           <a:xfrm>
-            <a:off x="9430235" y="4701898"/>
+            <a:off x="9370088" y="4641751"/>
             <a:ext cx="763524" cy="349250"/>
           </a:xfrm>
           <a:prstGeom prst="rect">
@@ -11880,7 +11880,7 @@
         </p:nvSpPr>
         <p:spPr>
           <a:xfrm>
-            <a:off x="9430235" y="2492652"/>
+            <a:off x="9370088" y="2552799"/>
             <a:ext cx="763524" cy="349250"/>
           </a:xfrm>
           <a:prstGeom prst="rect">
@@ -11919,7 +11919,7 @@
         </p:nvSpPr>
         <p:spPr>
           <a:xfrm>
-            <a:off x="7940894" y="3597275"/>
+            <a:off x="8016078" y="3597275"/>
             <a:ext cx="763524" cy="349250"/>
           </a:xfrm>
           <a:prstGeom prst="rect">
@@ -12545,8 +12545,8 @@
         </p:nvSpPr>
         <p:spPr>
           <a:xfrm>
-            <a:off x="7470709" y="1689531"/>
-            <a:ext cx="3834323" cy="3067458"/>
+            <a:off x="7642001" y="1826565"/>
+            <a:ext cx="3491738" cy="2793390"/>
           </a:xfrm>
           <a:custGeom>
             <a:avLst/>
@@ -12555,15 +12555,15 @@
             <a:cxnLst/>
             <a:rect l="l" t="t" r="r" b="b"/>
             <a:pathLst>
-              <a:path w="3834323" h="3067458">
+              <a:path w="3491738" h="2793390">
                 <a:moveTo>
-                  <a:pt x="0" y="3067458"/>
+                  <a:pt x="0" y="2793390"/>
                 </a:moveTo>
                 <a:lnTo>
-                  <a:pt x="3834323" y="3067458"/>
+                  <a:pt x="3491738" y="2793390"/>
                 </a:lnTo>
                 <a:lnTo>
-                  <a:pt x="766865" y="0"/>
+                  <a:pt x="698348" y="0"/>
                 </a:lnTo>
                 <a:close/>
               </a:path>
@@ -12588,8 +12588,8 @@
         </p:nvSpPr>
         <p:spPr>
           <a:xfrm>
-            <a:off x="8237574" y="1689531"/>
-            <a:ext cx="3067458" cy="3067458"/>
+            <a:off x="8340349" y="1826565"/>
+            <a:ext cx="2793390" cy="2793390"/>
           </a:xfrm>
           <a:custGeom>
             <a:avLst/>
@@ -12598,15 +12598,15 @@
             <a:cxnLst/>
             <a:rect l="l" t="t" r="r" b="b"/>
             <a:pathLst>
-              <a:path w="3067458" h="3067458">
+              <a:path w="2793390" h="2793390">
                 <a:moveTo>
                   <a:pt x="0" y="0"/>
                 </a:moveTo>
                 <a:lnTo>
-                  <a:pt x="3067458" y="3067458"/>
+                  <a:pt x="2793390" y="2793390"/>
                 </a:lnTo>
                 <a:lnTo>
-                  <a:pt x="2300594" y="0"/>
+                  <a:pt x="2095043" y="0"/>
                 </a:lnTo>
                 <a:close/>
               </a:path>
@@ -12631,7 +12631,7 @@
         </p:nvSpPr>
         <p:spPr>
           <a:xfrm>
-            <a:off x="9004438" y="4547439"/>
+            <a:off x="9038697" y="4410405"/>
             <a:ext cx="209550" cy="209550"/>
           </a:xfrm>
           <a:custGeom>
@@ -12671,8 +12671,8 @@
         </p:nvSpPr>
         <p:spPr>
           <a:xfrm>
-            <a:off x="9004438" y="1689531"/>
-            <a:ext cx="0" cy="3067458"/>
+            <a:off x="9038697" y="1826565"/>
+            <a:ext cx="0" cy="2793390"/>
           </a:xfrm>
           <a:prstGeom prst="line">
             <a:avLst/>
@@ -12694,7 +12694,7 @@
         </p:nvSpPr>
         <p:spPr>
           <a:xfrm>
-            <a:off x="9006108" y="4833824"/>
+            <a:off x="9006108" y="4696790"/>
             <a:ext cx="763524" cy="349250"/>
           </a:xfrm>
           <a:prstGeom prst="rect">
@@ -12733,7 +12733,7 @@
         </p:nvSpPr>
         <p:spPr>
           <a:xfrm>
-            <a:off x="9006108" y="1263446"/>
+            <a:off x="9006108" y="1400480"/>
             <a:ext cx="763524" cy="349250"/>
           </a:xfrm>
           <a:prstGeom prst="rect">
@@ -12772,7 +12772,7 @@
         </p:nvSpPr>
         <p:spPr>
           <a:xfrm>
-            <a:off x="8192400" y="3048635"/>
+            <a:off x="8226659" y="3048635"/>
             <a:ext cx="763524" cy="349250"/>
           </a:xfrm>
           <a:prstGeom prst="rect">
@@ -13368,8 +13368,8 @@
         </p:nvSpPr>
         <p:spPr>
           <a:xfrm>
-            <a:off x="7134013" y="3072045"/>
-            <a:ext cx="3649641" cy="2085509"/>
+            <a:off x="7262662" y="3145559"/>
+            <a:ext cx="3392345" cy="1938483"/>
           </a:xfrm>
           <a:custGeom>
             <a:avLst/>
@@ -13378,15 +13378,15 @@
             <a:cxnLst/>
             <a:rect l="l" t="t" r="r" b="b"/>
             <a:pathLst>
-              <a:path w="3649641" h="2085509">
+              <a:path w="3392345" h="1938483">
                 <a:moveTo>
-                  <a:pt x="0" y="2085509"/>
+                  <a:pt x="0" y="1938483"/>
                 </a:moveTo>
                 <a:lnTo>
-                  <a:pt x="3649641" y="2085509"/>
+                  <a:pt x="3392345" y="1938483"/>
                 </a:lnTo>
                 <a:lnTo>
-                  <a:pt x="2085509" y="0"/>
+                  <a:pt x="1938483" y="0"/>
                 </a:lnTo>
                 <a:lnTo>
                   <a:pt x="0" y="0"/>
@@ -13409,8 +13409,8 @@
         </p:nvSpPr>
         <p:spPr>
           <a:xfrm flipV="1">
-            <a:off x="6612636" y="2550668"/>
-            <a:ext cx="0" cy="3128264"/>
+            <a:off x="6778041" y="2660938"/>
+            <a:ext cx="0" cy="2907724"/>
           </a:xfrm>
           <a:prstGeom prst="line">
             <a:avLst/>
@@ -13432,8 +13432,8 @@
         </p:nvSpPr>
         <p:spPr>
           <a:xfrm flipV="1">
-            <a:off x="7134013" y="2550668"/>
-            <a:ext cx="0" cy="3128264"/>
+            <a:off x="7262662" y="2660938"/>
+            <a:ext cx="0" cy="2907724"/>
           </a:xfrm>
           <a:prstGeom prst="line">
             <a:avLst/>
@@ -13455,8 +13455,8 @@
         </p:nvSpPr>
         <p:spPr>
           <a:xfrm flipV="1">
-            <a:off x="7655391" y="2550668"/>
-            <a:ext cx="0" cy="3128264"/>
+            <a:off x="7747282" y="2660938"/>
+            <a:ext cx="0" cy="2907724"/>
           </a:xfrm>
           <a:prstGeom prst="line">
             <a:avLst/>
@@ -13478,8 +13478,8 @@
         </p:nvSpPr>
         <p:spPr>
           <a:xfrm flipV="1">
-            <a:off x="8176768" y="2550668"/>
-            <a:ext cx="0" cy="3128264"/>
+            <a:off x="8231903" y="2660938"/>
+            <a:ext cx="0" cy="2907724"/>
           </a:xfrm>
           <a:prstGeom prst="line">
             <a:avLst/>
@@ -13501,8 +13501,8 @@
         </p:nvSpPr>
         <p:spPr>
           <a:xfrm flipV="1">
-            <a:off x="8698145" y="2550668"/>
-            <a:ext cx="0" cy="3128264"/>
+            <a:off x="8716524" y="2660938"/>
+            <a:ext cx="0" cy="2907724"/>
           </a:xfrm>
           <a:prstGeom prst="line">
             <a:avLst/>
@@ -13524,8 +13524,8 @@
         </p:nvSpPr>
         <p:spPr>
           <a:xfrm flipV="1">
-            <a:off x="9219523" y="2550668"/>
-            <a:ext cx="0" cy="3128264"/>
+            <a:off x="9201144" y="2660938"/>
+            <a:ext cx="0" cy="2907724"/>
           </a:xfrm>
           <a:prstGeom prst="line">
             <a:avLst/>
@@ -13547,8 +13547,8 @@
         </p:nvSpPr>
         <p:spPr>
           <a:xfrm flipV="1">
-            <a:off x="9740900" y="2550668"/>
-            <a:ext cx="0" cy="3128264"/>
+            <a:off x="9685765" y="2660938"/>
+            <a:ext cx="0" cy="2907724"/>
           </a:xfrm>
           <a:prstGeom prst="line">
             <a:avLst/>
@@ -13570,8 +13570,8 @@
         </p:nvSpPr>
         <p:spPr>
           <a:xfrm flipV="1">
-            <a:off x="10262277" y="2550668"/>
-            <a:ext cx="0" cy="3128264"/>
+            <a:off x="10170386" y="2660938"/>
+            <a:ext cx="0" cy="2907724"/>
           </a:xfrm>
           <a:prstGeom prst="line">
             <a:avLst/>
@@ -13593,8 +13593,8 @@
         </p:nvSpPr>
         <p:spPr>
           <a:xfrm flipV="1">
-            <a:off x="10783655" y="2550668"/>
-            <a:ext cx="0" cy="3128264"/>
+            <a:off x="10655006" y="2660938"/>
+            <a:ext cx="0" cy="2907724"/>
           </a:xfrm>
           <a:prstGeom prst="line">
             <a:avLst/>
@@ -13616,8 +13616,8 @@
         </p:nvSpPr>
         <p:spPr>
           <a:xfrm flipV="1">
-            <a:off x="11305032" y="2550668"/>
-            <a:ext cx="0" cy="3128264"/>
+            <a:off x="11139627" y="2660938"/>
+            <a:ext cx="0" cy="2907724"/>
           </a:xfrm>
           <a:prstGeom prst="line">
             <a:avLst/>
@@ -13639,8 +13639,8 @@
         </p:nvSpPr>
         <p:spPr>
           <a:xfrm>
-            <a:off x="6612636" y="5678932"/>
-            <a:ext cx="4692396" cy="0"/>
+            <a:off x="6778041" y="5568662"/>
+            <a:ext cx="4361586" cy="0"/>
           </a:xfrm>
           <a:prstGeom prst="line">
             <a:avLst/>
@@ -13662,8 +13662,8 @@
         </p:nvSpPr>
         <p:spPr>
           <a:xfrm>
-            <a:off x="6612636" y="5157555"/>
-            <a:ext cx="4692396" cy="0"/>
+            <a:off x="6778041" y="5084041"/>
+            <a:ext cx="4361586" cy="0"/>
           </a:xfrm>
           <a:prstGeom prst="line">
             <a:avLst/>
@@ -13685,8 +13685,8 @@
         </p:nvSpPr>
         <p:spPr>
           <a:xfrm>
-            <a:off x="6612636" y="4636177"/>
-            <a:ext cx="4692396" cy="0"/>
+            <a:off x="6778041" y="4599421"/>
+            <a:ext cx="4361586" cy="0"/>
           </a:xfrm>
           <a:prstGeom prst="line">
             <a:avLst/>
@@ -13708,8 +13708,8 @@
         </p:nvSpPr>
         <p:spPr>
           <a:xfrm>
-            <a:off x="6612636" y="4114800"/>
-            <a:ext cx="4692396" cy="0"/>
+            <a:off x="6778041" y="4114800"/>
+            <a:ext cx="4361586" cy="0"/>
           </a:xfrm>
           <a:prstGeom prst="line">
             <a:avLst/>
@@ -13731,8 +13731,8 @@
         </p:nvSpPr>
         <p:spPr>
           <a:xfrm>
-            <a:off x="6612636" y="3593423"/>
-            <a:ext cx="4692396" cy="0"/>
+            <a:off x="6778041" y="3630179"/>
+            <a:ext cx="4361586" cy="0"/>
           </a:xfrm>
           <a:prstGeom prst="line">
             <a:avLst/>
@@ -13754,8 +13754,8 @@
         </p:nvSpPr>
         <p:spPr>
           <a:xfrm>
-            <a:off x="6612636" y="3072045"/>
-            <a:ext cx="4692396" cy="0"/>
+            <a:off x="6778041" y="3145559"/>
+            <a:ext cx="4361586" cy="0"/>
           </a:xfrm>
           <a:prstGeom prst="line">
             <a:avLst/>
@@ -13777,8 +13777,8 @@
         </p:nvSpPr>
         <p:spPr>
           <a:xfrm>
-            <a:off x="6612636" y="2550668"/>
-            <a:ext cx="4692396" cy="0"/>
+            <a:off x="6778041" y="2660938"/>
+            <a:ext cx="4361586" cy="0"/>
           </a:xfrm>
           <a:prstGeom prst="line">
             <a:avLst/>
@@ -13800,8 +13800,8 @@
         </p:nvSpPr>
         <p:spPr>
           <a:xfrm>
-            <a:off x="7134013" y="3072045"/>
-            <a:ext cx="3649641" cy="2085509"/>
+            <a:off x="7262662" y="3145559"/>
+            <a:ext cx="3392345" cy="1938483"/>
           </a:xfrm>
           <a:custGeom>
             <a:avLst/>
@@ -13810,15 +13810,15 @@
             <a:cxnLst/>
             <a:rect l="l" t="t" r="r" b="b"/>
             <a:pathLst>
-              <a:path w="3649641" h="2085509">
+              <a:path w="3392345" h="1938483">
                 <a:moveTo>
-                  <a:pt x="0" y="2085509"/>
+                  <a:pt x="0" y="1938483"/>
                 </a:moveTo>
                 <a:lnTo>
-                  <a:pt x="3649641" y="2085509"/>
+                  <a:pt x="3392345" y="1938483"/>
                 </a:lnTo>
                 <a:lnTo>
-                  <a:pt x="2085509" y="0"/>
+                  <a:pt x="1938483" y="0"/>
                 </a:lnTo>
                 <a:lnTo>
                   <a:pt x="0" y="0"/>
@@ -13844,7 +13844,7 @@
         </p:nvSpPr>
         <p:spPr>
           <a:xfrm>
-            <a:off x="7134013" y="4948005"/>
+            <a:off x="7262662" y="4874491"/>
             <a:ext cx="209550" cy="209550"/>
           </a:xfrm>
           <a:custGeom>
@@ -13884,7 +13884,7 @@
         </p:nvSpPr>
         <p:spPr>
           <a:xfrm>
-            <a:off x="8577072" y="5234390"/>
+            <a:off x="8577072" y="5160876"/>
             <a:ext cx="763524" cy="349250"/>
           </a:xfrm>
           <a:prstGeom prst="rect">
@@ -13923,7 +13923,7 @@
         </p:nvSpPr>
         <p:spPr>
           <a:xfrm>
-            <a:off x="7795006" y="2645960"/>
+            <a:off x="7850141" y="2719474"/>
             <a:ext cx="763524" cy="349250"/>
           </a:xfrm>
           <a:prstGeom prst="rect">
@@ -13962,7 +13962,7 @@
         </p:nvSpPr>
         <p:spPr>
           <a:xfrm>
-            <a:off x="6321975" y="3940175"/>
+            <a:off x="6450624" y="3940175"/>
             <a:ext cx="763524" cy="349250"/>
           </a:xfrm>
           <a:prstGeom prst="rect">
@@ -14442,8 +14442,8 @@
         </p:nvSpPr>
         <p:spPr>
           <a:xfrm>
-            <a:off x="1359256" y="2272589"/>
-            <a:ext cx="4278020" cy="1901342"/>
+            <a:off x="1494587" y="2332736"/>
+            <a:ext cx="4007358" cy="1781048"/>
           </a:xfrm>
           <a:custGeom>
             <a:avLst/>
@@ -14452,18 +14452,18 @@
             <a:cxnLst/>
             <a:rect l="l" t="t" r="r" b="b"/>
             <a:pathLst>
-              <a:path w="4278020" h="1901342">
+              <a:path w="4007358" h="1781048">
                 <a:moveTo>
-                  <a:pt x="0" y="1901342"/>
+                  <a:pt x="0" y="1781048"/>
                 </a:moveTo>
                 <a:lnTo>
-                  <a:pt x="4278020" y="1901342"/>
+                  <a:pt x="4007358" y="1781048"/>
                 </a:lnTo>
                 <a:lnTo>
-                  <a:pt x="2852014" y="0"/>
+                  <a:pt x="2671572" y="0"/>
                 </a:lnTo>
                 <a:lnTo>
-                  <a:pt x="1426007" y="0"/>
+                  <a:pt x="1335786" y="0"/>
                 </a:lnTo>
                 <a:close/>
               </a:path>
@@ -14483,8 +14483,8 @@
         </p:nvSpPr>
         <p:spPr>
           <a:xfrm flipV="1">
-            <a:off x="883920" y="1797253"/>
-            <a:ext cx="0" cy="2852014"/>
+            <a:off x="1049325" y="1887474"/>
+            <a:ext cx="0" cy="2671572"/>
           </a:xfrm>
           <a:prstGeom prst="line">
             <a:avLst/>
@@ -14506,8 +14506,8 @@
         </p:nvSpPr>
         <p:spPr>
           <a:xfrm flipV="1">
-            <a:off x="1359256" y="1797253"/>
-            <a:ext cx="0" cy="2852014"/>
+            <a:off x="1494587" y="1887474"/>
+            <a:ext cx="0" cy="2671572"/>
           </a:xfrm>
           <a:prstGeom prst="line">
             <a:avLst/>
@@ -14529,8 +14529,8 @@
         </p:nvSpPr>
         <p:spPr>
           <a:xfrm flipV="1">
-            <a:off x="1834591" y="1797253"/>
-            <a:ext cx="0" cy="2852014"/>
+            <a:off x="1939849" y="1887474"/>
+            <a:ext cx="0" cy="2671572"/>
           </a:xfrm>
           <a:prstGeom prst="line">
             <a:avLst/>
@@ -14552,8 +14552,8 @@
         </p:nvSpPr>
         <p:spPr>
           <a:xfrm flipV="1">
-            <a:off x="2309927" y="1797253"/>
-            <a:ext cx="0" cy="2852014"/>
+            <a:off x="2385111" y="1887474"/>
+            <a:ext cx="0" cy="2671572"/>
           </a:xfrm>
           <a:prstGeom prst="line">
             <a:avLst/>
@@ -14575,8 +14575,8 @@
         </p:nvSpPr>
         <p:spPr>
           <a:xfrm flipV="1">
-            <a:off x="2785262" y="1797253"/>
-            <a:ext cx="0" cy="2852014"/>
+            <a:off x="2830373" y="1887474"/>
+            <a:ext cx="0" cy="2671572"/>
           </a:xfrm>
           <a:prstGeom prst="line">
             <a:avLst/>
@@ -14598,8 +14598,8 @@
         </p:nvSpPr>
         <p:spPr>
           <a:xfrm flipV="1">
-            <a:off x="3260598" y="1797253"/>
-            <a:ext cx="0" cy="2852014"/>
+            <a:off x="3275635" y="1887474"/>
+            <a:ext cx="0" cy="2671572"/>
           </a:xfrm>
           <a:prstGeom prst="line">
             <a:avLst/>
@@ -14621,8 +14621,8 @@
         </p:nvSpPr>
         <p:spPr>
           <a:xfrm flipV="1">
-            <a:off x="3735934" y="1797253"/>
-            <a:ext cx="0" cy="2852014"/>
+            <a:off x="3720897" y="1887474"/>
+            <a:ext cx="0" cy="2671572"/>
           </a:xfrm>
           <a:prstGeom prst="line">
             <a:avLst/>
@@ -14644,8 +14644,8 @@
         </p:nvSpPr>
         <p:spPr>
           <a:xfrm flipV="1">
-            <a:off x="4211269" y="1797253"/>
-            <a:ext cx="0" cy="2852014"/>
+            <a:off x="4166159" y="1887474"/>
+            <a:ext cx="0" cy="2671572"/>
           </a:xfrm>
           <a:prstGeom prst="line">
             <a:avLst/>
@@ -14667,8 +14667,8 @@
         </p:nvSpPr>
         <p:spPr>
           <a:xfrm flipV="1">
-            <a:off x="4686605" y="1797253"/>
-            <a:ext cx="0" cy="2852014"/>
+            <a:off x="4611421" y="1887474"/>
+            <a:ext cx="0" cy="2671572"/>
           </a:xfrm>
           <a:prstGeom prst="line">
             <a:avLst/>
@@ -14690,8 +14690,8 @@
         </p:nvSpPr>
         <p:spPr>
           <a:xfrm flipV="1">
-            <a:off x="5161940" y="1797253"/>
-            <a:ext cx="0" cy="2852014"/>
+            <a:off x="5056683" y="1887474"/>
+            <a:ext cx="0" cy="2671572"/>
           </a:xfrm>
           <a:prstGeom prst="line">
             <a:avLst/>
@@ -14713,8 +14713,8 @@
         </p:nvSpPr>
         <p:spPr>
           <a:xfrm flipV="1">
-            <a:off x="5637276" y="1797253"/>
-            <a:ext cx="0" cy="2852014"/>
+            <a:off x="5501945" y="1887474"/>
+            <a:ext cx="0" cy="2671572"/>
           </a:xfrm>
           <a:prstGeom prst="line">
             <a:avLst/>
@@ -14736,8 +14736,8 @@
         </p:nvSpPr>
         <p:spPr>
           <a:xfrm flipV="1">
-            <a:off x="6112612" y="1797253"/>
-            <a:ext cx="0" cy="2852014"/>
+            <a:off x="5947207" y="1887474"/>
+            <a:ext cx="0" cy="2671572"/>
           </a:xfrm>
           <a:prstGeom prst="line">
             <a:avLst/>
@@ -14759,8 +14759,8 @@
         </p:nvSpPr>
         <p:spPr>
           <a:xfrm>
-            <a:off x="883920" y="4649267"/>
-            <a:ext cx="5228692" cy="0"/>
+            <a:off x="1049325" y="4559046"/>
+            <a:ext cx="4897882" cy="0"/>
           </a:xfrm>
           <a:prstGeom prst="line">
             <a:avLst/>
@@ -14782,8 +14782,8 @@
         </p:nvSpPr>
         <p:spPr>
           <a:xfrm>
-            <a:off x="883920" y="4173931"/>
-            <a:ext cx="5228692" cy="0"/>
+            <a:off x="1049325" y="4113784"/>
+            <a:ext cx="4897882" cy="0"/>
           </a:xfrm>
           <a:prstGeom prst="line">
             <a:avLst/>
@@ -14805,8 +14805,8 @@
         </p:nvSpPr>
         <p:spPr>
           <a:xfrm>
-            <a:off x="883920" y="3698596"/>
-            <a:ext cx="5228692" cy="0"/>
+            <a:off x="1049325" y="3668522"/>
+            <a:ext cx="4897882" cy="0"/>
           </a:xfrm>
           <a:prstGeom prst="line">
             <a:avLst/>
@@ -14828,8 +14828,8 @@
         </p:nvSpPr>
         <p:spPr>
           <a:xfrm>
-            <a:off x="883920" y="3223260"/>
-            <a:ext cx="5228692" cy="0"/>
+            <a:off x="1049325" y="3223260"/>
+            <a:ext cx="4897882" cy="0"/>
           </a:xfrm>
           <a:prstGeom prst="line">
             <a:avLst/>
@@ -14851,8 +14851,8 @@
         </p:nvSpPr>
         <p:spPr>
           <a:xfrm>
-            <a:off x="883920" y="2747924"/>
-            <a:ext cx="5228692" cy="0"/>
+            <a:off x="1049325" y="2777998"/>
+            <a:ext cx="4897882" cy="0"/>
           </a:xfrm>
           <a:prstGeom prst="line">
             <a:avLst/>
@@ -14874,8 +14874,8 @@
         </p:nvSpPr>
         <p:spPr>
           <a:xfrm>
-            <a:off x="883920" y="2272589"/>
-            <a:ext cx="5228692" cy="0"/>
+            <a:off x="1049325" y="2332736"/>
+            <a:ext cx="4897882" cy="0"/>
           </a:xfrm>
           <a:prstGeom prst="line">
             <a:avLst/>
@@ -14897,8 +14897,8 @@
         </p:nvSpPr>
         <p:spPr>
           <a:xfrm>
-            <a:off x="883920" y="1797253"/>
-            <a:ext cx="5228692" cy="0"/>
+            <a:off x="1049325" y="1887474"/>
+            <a:ext cx="4897882" cy="0"/>
           </a:xfrm>
           <a:prstGeom prst="line">
             <a:avLst/>
@@ -14920,8 +14920,8 @@
         </p:nvSpPr>
         <p:spPr>
           <a:xfrm>
-            <a:off x="1359256" y="2272589"/>
-            <a:ext cx="4278020" cy="1901342"/>
+            <a:off x="1494587" y="2332736"/>
+            <a:ext cx="4007358" cy="1781048"/>
           </a:xfrm>
           <a:custGeom>
             <a:avLst/>
@@ -14930,18 +14930,18 @@
             <a:cxnLst/>
             <a:rect l="l" t="t" r="r" b="b"/>
             <a:pathLst>
-              <a:path w="4278020" h="1901342">
+              <a:path w="4007358" h="1781048">
                 <a:moveTo>
-                  <a:pt x="0" y="1901342"/>
+                  <a:pt x="0" y="1781048"/>
                 </a:moveTo>
                 <a:lnTo>
-                  <a:pt x="4278020" y="1901342"/>
+                  <a:pt x="4007358" y="1781048"/>
                 </a:lnTo>
                 <a:lnTo>
-                  <a:pt x="2852014" y="0"/>
+                  <a:pt x="2671572" y="0"/>
                 </a:lnTo>
                 <a:lnTo>
-                  <a:pt x="1426007" y="0"/>
+                  <a:pt x="1335786" y="0"/>
                 </a:lnTo>
                 <a:close/>
               </a:path>
@@ -14964,7 +14964,7 @@
         </p:nvSpPr>
         <p:spPr>
           <a:xfrm>
-            <a:off x="2785262" y="3964381"/>
+            <a:off x="2830373" y="3904234"/>
             <a:ext cx="209550" cy="209550"/>
           </a:xfrm>
           <a:custGeom>
@@ -15004,8 +15004,8 @@
         </p:nvSpPr>
         <p:spPr>
           <a:xfrm>
-            <a:off x="2785262" y="2272589"/>
-            <a:ext cx="0" cy="1901342"/>
+            <a:off x="2830373" y="2332736"/>
+            <a:ext cx="0" cy="1781048"/>
           </a:xfrm>
           <a:prstGeom prst="line">
             <a:avLst/>
@@ -15027,7 +15027,7 @@
         </p:nvSpPr>
         <p:spPr>
           <a:xfrm>
-            <a:off x="3116504" y="4250766"/>
+            <a:off x="3116504" y="4190619"/>
             <a:ext cx="763524" cy="349250"/>
           </a:xfrm>
           <a:prstGeom prst="rect">
@@ -15066,7 +15066,7 @@
         </p:nvSpPr>
         <p:spPr>
           <a:xfrm>
-            <a:off x="3116504" y="1846504"/>
+            <a:off x="3116504" y="1906651"/>
             <a:ext cx="763524" cy="349250"/>
           </a:xfrm>
           <a:prstGeom prst="rect">
@@ -15105,7 +15105,7 @@
         </p:nvSpPr>
         <p:spPr>
           <a:xfrm>
-            <a:off x="1321242" y="2771694"/>
+            <a:off x="1411463" y="2771694"/>
             <a:ext cx="763524" cy="349250"/>
           </a:xfrm>
           <a:prstGeom prst="rect">
@@ -15144,7 +15144,7 @@
         </p:nvSpPr>
         <p:spPr>
           <a:xfrm>
-            <a:off x="2833776" y="3048635"/>
+            <a:off x="2878887" y="3048635"/>
             <a:ext cx="763524" cy="349250"/>
           </a:xfrm>
           <a:prstGeom prst="rect">
@@ -16711,8 +16711,8 @@
         </p:nvSpPr>
         <p:spPr>
           <a:xfrm>
-            <a:off x="883920" y="2693680"/>
-            <a:ext cx="4263360" cy="1421120"/>
+            <a:off x="1049325" y="2803950"/>
+            <a:ext cx="3932550" cy="1310850"/>
           </a:xfrm>
           <a:custGeom>
             <a:avLst/>
@@ -16721,15 +16721,15 @@
             <a:cxnLst/>
             <a:rect l="l" t="t" r="r" b="b"/>
             <a:pathLst>
-              <a:path w="4263360" h="1421120">
+              <a:path w="3932550" h="1310850">
                 <a:moveTo>
-                  <a:pt x="0" y="1421120"/>
+                  <a:pt x="0" y="1310850"/>
                 </a:moveTo>
                 <a:lnTo>
-                  <a:pt x="4263360" y="1421120"/>
+                  <a:pt x="3932550" y="1310850"/>
                 </a:lnTo>
                 <a:lnTo>
-                  <a:pt x="2131680" y="0"/>
+                  <a:pt x="1966275" y="0"/>
                 </a:lnTo>
                 <a:close/>
               </a:path>
@@ -16754,8 +16754,8 @@
         </p:nvSpPr>
         <p:spPr>
           <a:xfrm>
-            <a:off x="883920" y="4114800"/>
-            <a:ext cx="4263360" cy="1421120"/>
+            <a:off x="1049325" y="4114800"/>
+            <a:ext cx="3932550" cy="1310850"/>
           </a:xfrm>
           <a:custGeom>
             <a:avLst/>
@@ -16764,15 +16764,15 @@
             <a:cxnLst/>
             <a:rect l="l" t="t" r="r" b="b"/>
             <a:pathLst>
-              <a:path w="4263360" h="1421120">
+              <a:path w="3932550" h="1310850">
                 <a:moveTo>
                   <a:pt x="0" y="0"/>
                 </a:moveTo>
                 <a:lnTo>
-                  <a:pt x="2131680" y="1421120"/>
+                  <a:pt x="1966275" y="1310850"/>
                 </a:lnTo>
                 <a:lnTo>
-                  <a:pt x="4263360" y="0"/>
+                  <a:pt x="3932550" y="0"/>
                 </a:lnTo>
                 <a:close/>
               </a:path>
@@ -16837,8 +16837,8 @@
         </p:nvSpPr>
         <p:spPr>
           <a:xfrm>
-            <a:off x="3015600" y="2693680"/>
-            <a:ext cx="0" cy="1421120"/>
+            <a:off x="3015600" y="2803950"/>
+            <a:ext cx="0" cy="1310850"/>
           </a:xfrm>
           <a:prstGeom prst="line">
             <a:avLst/>
@@ -16861,7 +16861,7 @@
         <p:spPr>
           <a:xfrm>
             <a:off x="3015600" y="4114800"/>
-            <a:ext cx="0" cy="1421120"/>
+            <a:ext cx="0" cy="1310850"/>
           </a:xfrm>
           <a:prstGeom prst="line">
             <a:avLst/>
@@ -16883,7 +16883,7 @@
         </p:nvSpPr>
         <p:spPr>
           <a:xfrm>
-            <a:off x="3064114" y="3229615"/>
+            <a:off x="3064114" y="3284750"/>
             <a:ext cx="763524" cy="349250"/>
           </a:xfrm>
           <a:prstGeom prst="rect">
@@ -16922,7 +16922,7 @@
         </p:nvSpPr>
         <p:spPr>
           <a:xfrm>
-            <a:off x="3064114" y="4650735"/>
+            <a:off x="3064114" y="4595600"/>
             <a:ext cx="763524" cy="349250"/>
           </a:xfrm>
           <a:prstGeom prst="rect">
@@ -16961,7 +16961,7 @@
         </p:nvSpPr>
         <p:spPr>
           <a:xfrm>
-            <a:off x="2136446" y="3442783"/>
+            <a:off x="2175040" y="3481378"/>
             <a:ext cx="763524" cy="349250"/>
           </a:xfrm>
           <a:prstGeom prst="rect">
